--- a/CSE7302-Internship_Review-2 Deloitte.pptx
+++ b/CSE7302-Internship_Review-2 Deloitte.pptx
@@ -4812,7 +4812,7 @@
             <a:fld id="{448B91F7-0A31-4809-8E31-54F32ACD1E72}" type="datetimeFigureOut">
               <a:rPr lang="en-GB" smtClean="0"/>
               <a:pPr/>
-              <a:t>30/01/2026</a:t>
+              <a:t>22/04/2026</a:t>
             </a:fld>
             <a:endParaRPr lang="en-GB" dirty="0"/>
           </a:p>
@@ -5463,7 +5463,7 @@
             <a:fld id="{1F66083A-C1B7-4B46-82C5-289BB6E6D5A4}" type="datetime1">
               <a:rPr lang="en-IN" smtClean="0"/>
               <a:pPr/>
-              <a:t>30-01-2026</a:t>
+              <a:t>22-04-2026</a:t>
             </a:fld>
             <a:endParaRPr lang="en-IN" dirty="0"/>
           </a:p>
@@ -5665,7 +5665,7 @@
             <a:fld id="{3FC26915-BE00-456E-A9CA-DB9FE1FD674A}" type="datetime1">
               <a:rPr lang="en-IN" smtClean="0"/>
               <a:pPr/>
-              <a:t>30-01-2026</a:t>
+              <a:t>22-04-2026</a:t>
             </a:fld>
             <a:endParaRPr lang="en-IN" dirty="0"/>
           </a:p>
@@ -5877,7 +5877,7 @@
             <a:fld id="{FAA2D233-408A-4415-B919-B7ECAA5043E2}" type="datetime1">
               <a:rPr lang="en-IN" smtClean="0"/>
               <a:pPr/>
-              <a:t>30-01-2026</a:t>
+              <a:t>22-04-2026</a:t>
             </a:fld>
             <a:endParaRPr lang="en-IN" dirty="0"/>
           </a:p>
@@ -6093,7 +6093,7 @@
             <a:fld id="{864BFFB7-4443-4602-A990-B076C1CFE86C}" type="datetime1">
               <a:rPr lang="en-IN" smtClean="0"/>
               <a:pPr/>
-              <a:t>30-01-2026</a:t>
+              <a:t>22-04-2026</a:t>
             </a:fld>
             <a:endParaRPr lang="en-IN" dirty="0"/>
           </a:p>
@@ -6381,7 +6381,7 @@
             <a:fld id="{2B3E8F52-857A-4C89-954C-57943DB51290}" type="datetime1">
               <a:rPr lang="en-IN" smtClean="0"/>
               <a:pPr/>
-              <a:t>30-01-2026</a:t>
+              <a:t>22-04-2026</a:t>
             </a:fld>
             <a:endParaRPr lang="en-IN" dirty="0"/>
           </a:p>
@@ -6651,7 +6651,7 @@
             <a:fld id="{2BBD7B4D-DDD6-4CA2-87A0-9BDD5E5268EC}" type="datetime1">
               <a:rPr lang="en-IN" smtClean="0"/>
               <a:pPr/>
-              <a:t>30-01-2026</a:t>
+              <a:t>22-04-2026</a:t>
             </a:fld>
             <a:endParaRPr lang="en-IN" dirty="0"/>
           </a:p>
@@ -7068,7 +7068,7 @@
             <a:fld id="{C130D9E5-0635-43A8-8973-488E7408FAF7}" type="datetime1">
               <a:rPr lang="en-IN" smtClean="0"/>
               <a:pPr/>
-              <a:t>30-01-2026</a:t>
+              <a:t>22-04-2026</a:t>
             </a:fld>
             <a:endParaRPr lang="en-IN" dirty="0"/>
           </a:p>
@@ -7212,7 +7212,7 @@
             <a:fld id="{E1D0CEA8-D591-4CC9-939A-A3BE6FD93E89}" type="datetime1">
               <a:rPr lang="en-IN" smtClean="0"/>
               <a:pPr/>
-              <a:t>30-01-2026</a:t>
+              <a:t>22-04-2026</a:t>
             </a:fld>
             <a:endParaRPr lang="en-IN" dirty="0"/>
           </a:p>
@@ -7327,7 +7327,7 @@
             <a:fld id="{D2BE2297-DC8B-48E6-B6D6-34773F9A5984}" type="datetime1">
               <a:rPr lang="en-IN" smtClean="0"/>
               <a:pPr/>
-              <a:t>30-01-2026</a:t>
+              <a:t>22-04-2026</a:t>
             </a:fld>
             <a:endParaRPr lang="en-IN" dirty="0"/>
           </a:p>
@@ -7642,7 +7642,7 @@
             <a:fld id="{64C2A547-6E4B-4188-9BD5-035CB9C4BCC5}" type="datetime1">
               <a:rPr lang="en-IN" smtClean="0"/>
               <a:pPr/>
-              <a:t>30-01-2026</a:t>
+              <a:t>22-04-2026</a:t>
             </a:fld>
             <a:endParaRPr lang="en-IN" dirty="0"/>
           </a:p>
@@ -7933,7 +7933,7 @@
             <a:fld id="{02706E29-16A1-4AAE-B55B-4E3DB7265605}" type="datetime1">
               <a:rPr lang="en-IN" smtClean="0"/>
               <a:pPr/>
-              <a:t>30-01-2026</a:t>
+              <a:t>22-04-2026</a:t>
             </a:fld>
             <a:endParaRPr lang="en-IN" dirty="0"/>
           </a:p>
@@ -8187,7 +8187,7 @@
             <a:fld id="{2EAC608B-7A9F-4336-97A2-89908E443DAD}" type="datetime1">
               <a:rPr lang="en-IN" smtClean="0"/>
               <a:pPr/>
-              <a:t>30-01-2026</a:t>
+              <a:t>22-04-2026</a:t>
             </a:fld>
             <a:endParaRPr lang="en-IN" dirty="0"/>
           </a:p>
@@ -8724,7 +8724,7 @@
                 <a:ea typeface="Cambria"/>
                 <a:cs typeface="Verdana"/>
               </a:rPr>
-              <a:t>Assistant Professor</a:t>
+              <a:t>Assistant Professor - PSCS</a:t>
             </a:r>
             <a:endParaRPr lang="en-US" dirty="0" smtClean="0">
               <a:latin typeface="Cambria"/>
@@ -8793,258 +8793,6 @@
             <a:endParaRPr sz="2000" b="1" i="0" u="none" strike="noStrike" cap="none" dirty="0">
               <a:solidFill>
                 <a:srgbClr val="17365D"/>
-              </a:solidFill>
-              <a:latin typeface="Cambria" panose="02040503050406030204" pitchFamily="18" charset="0"/>
-              <a:ea typeface="Cambria" panose="02040503050406030204" pitchFamily="18" charset="0"/>
-              <a:cs typeface="Verdana"/>
-              <a:sym typeface="Verdana"/>
-            </a:endParaRPr>
-          </a:p>
-        </p:txBody>
-      </p:sp>
-      <p:sp>
-        <p:nvSpPr>
-          <p:cNvPr id="8" name="Google Shape;91;p13"/>
-          <p:cNvSpPr txBox="1"/>
-          <p:nvPr/>
-        </p:nvSpPr>
-        <p:spPr>
-          <a:xfrm>
-            <a:off x="156411" y="4130278"/>
-            <a:ext cx="12249915" cy="1562100"/>
-          </a:xfrm>
-          <a:prstGeom prst="rect">
-            <a:avLst/>
-          </a:prstGeom>
-          <a:noFill/>
-          <a:ln>
-            <a:noFill/>
-          </a:ln>
-        </p:spPr>
-        <p:txBody>
-          <a:bodyPr spcFirstLastPara="1" wrap="square" lIns="91425" tIns="45700" rIns="91425" bIns="45700" anchor="t" anchorCtr="0">
-            <a:noAutofit/>
-          </a:bodyPr>
-          <a:lstStyle/>
-          <a:p>
-            <a:pPr lvl="0">
-              <a:buClr>
-                <a:srgbClr val="17365D"/>
-              </a:buClr>
-              <a:buSzPct val="100000"/>
-            </a:pPr>
-            <a:r>
-              <a:rPr lang="en-US" sz="2000" b="1" i="0" u="none" strike="noStrike" cap="none" dirty="0" smtClean="0">
-                <a:solidFill>
-                  <a:schemeClr val="accent1"/>
-                </a:solidFill>
-                <a:latin typeface="Cambria" panose="02040503050406030204" pitchFamily="18" charset="0"/>
-                <a:ea typeface="Cambria" panose="02040503050406030204" pitchFamily="18" charset="0"/>
-                <a:cs typeface="Verdana"/>
-                <a:sym typeface="Verdana"/>
-              </a:rPr>
-              <a:t>Name of the Program: </a:t>
-            </a:r>
-            <a:r>
-              <a:rPr lang="en-US" sz="2000" b="1" dirty="0" smtClean="0">
-                <a:solidFill>
-                  <a:schemeClr val="accent1"/>
-                </a:solidFill>
-                <a:latin typeface="Cambria" panose="02040503050406030204" pitchFamily="18" charset="0"/>
-                <a:ea typeface="Cambria" panose="02040503050406030204" pitchFamily="18" charset="0"/>
-                <a:cs typeface="Verdana"/>
-                <a:sym typeface="Verdana"/>
-              </a:rPr>
-              <a:t>B.Tech - CBD</a:t>
-            </a:r>
-            <a:endParaRPr lang="en-US" sz="2000" b="1" i="0" u="none" strike="noStrike" cap="none" dirty="0" smtClean="0">
-              <a:solidFill>
-                <a:schemeClr val="accent1"/>
-              </a:solidFill>
-              <a:latin typeface="Cambria" panose="02040503050406030204" pitchFamily="18" charset="0"/>
-              <a:ea typeface="Cambria" panose="02040503050406030204" pitchFamily="18" charset="0"/>
-              <a:cs typeface="Verdana"/>
-              <a:sym typeface="Verdana"/>
-            </a:endParaRPr>
-          </a:p>
-          <a:p>
-            <a:pPr lvl="0">
-              <a:buClr>
-                <a:srgbClr val="17365D"/>
-              </a:buClr>
-              <a:buSzPct val="100000"/>
-            </a:pPr>
-            <a:r>
-              <a:rPr lang="en-US" sz="2000" b="1" dirty="0" smtClean="0">
-                <a:solidFill>
-                  <a:schemeClr val="accent1"/>
-                </a:solidFill>
-                <a:latin typeface="Cambria" panose="02040503050406030204" pitchFamily="18" charset="0"/>
-                <a:ea typeface="Cambria" panose="02040503050406030204" pitchFamily="18" charset="0"/>
-                <a:cs typeface="Verdana"/>
-                <a:sym typeface="Verdana"/>
-              </a:rPr>
-              <a:t>Name of the HoD: </a:t>
-            </a:r>
-            <a:r>
-              <a:rPr lang="en-US" sz="2000" b="1" dirty="0" smtClean="0">
-                <a:solidFill>
-                  <a:schemeClr val="accent1"/>
-                </a:solidFill>
-                <a:latin typeface="Cambria" panose="02040503050406030204" pitchFamily="18" charset="0"/>
-                <a:ea typeface="Cambria" panose="02040503050406030204" pitchFamily="18" charset="0"/>
-                <a:cs typeface="Verdana"/>
-                <a:sym typeface="Verdana"/>
-              </a:rPr>
-              <a:t>Dr. Pravinth Raja</a:t>
-            </a:r>
-            <a:endParaRPr lang="en-US" sz="2000" b="1" dirty="0" smtClean="0">
-              <a:solidFill>
-                <a:schemeClr val="accent1"/>
-              </a:solidFill>
-              <a:latin typeface="Cambria" panose="02040503050406030204" pitchFamily="18" charset="0"/>
-              <a:ea typeface="Cambria" panose="02040503050406030204" pitchFamily="18" charset="0"/>
-              <a:cs typeface="Verdana"/>
-              <a:sym typeface="Verdana"/>
-            </a:endParaRPr>
-          </a:p>
-          <a:p>
-            <a:pPr lvl="0">
-              <a:buClr>
-                <a:srgbClr val="17365D"/>
-              </a:buClr>
-              <a:buSzPct val="100000"/>
-            </a:pPr>
-            <a:r>
-              <a:rPr lang="en-US" sz="2000" b="1" i="0" u="none" strike="noStrike" cap="none" dirty="0" smtClean="0">
-                <a:solidFill>
-                  <a:schemeClr val="accent1"/>
-                </a:solidFill>
-                <a:latin typeface="Cambria" panose="02040503050406030204" pitchFamily="18" charset="0"/>
-                <a:ea typeface="Cambria" panose="02040503050406030204" pitchFamily="18" charset="0"/>
-                <a:cs typeface="Verdana"/>
-                <a:sym typeface="Verdana"/>
-              </a:rPr>
-              <a:t>Name of the Program Internship Coordinator: </a:t>
-            </a:r>
-            <a:r>
-              <a:rPr lang="en-US" sz="2000" b="1" dirty="0" smtClean="0">
-                <a:solidFill>
-                  <a:schemeClr val="accent1"/>
-                </a:solidFill>
-                <a:latin typeface="Cambria" panose="02040503050406030204" pitchFamily="18" charset="0"/>
-                <a:ea typeface="Cambria" panose="02040503050406030204" pitchFamily="18" charset="0"/>
-                <a:cs typeface="Verdana"/>
-                <a:sym typeface="Verdana"/>
-              </a:rPr>
-              <a:t>Ms. Nisha Robin Rohit</a:t>
-            </a:r>
-            <a:endParaRPr lang="en-US" sz="2000" b="1" i="0" u="none" strike="noStrike" cap="none" dirty="0" smtClean="0">
-              <a:solidFill>
-                <a:schemeClr val="accent1"/>
-              </a:solidFill>
-              <a:latin typeface="Cambria" panose="02040503050406030204" pitchFamily="18" charset="0"/>
-              <a:ea typeface="Cambria" panose="02040503050406030204" pitchFamily="18" charset="0"/>
-              <a:cs typeface="Verdana"/>
-              <a:sym typeface="Verdana"/>
-            </a:endParaRPr>
-          </a:p>
-          <a:p>
-            <a:pPr lvl="0">
-              <a:buClr>
-                <a:srgbClr val="17365D"/>
-              </a:buClr>
-              <a:buSzPct val="100000"/>
-            </a:pPr>
-            <a:r>
-              <a:rPr lang="en-US" sz="2000" b="1" dirty="0">
-                <a:solidFill>
-                  <a:schemeClr val="accent1"/>
-                </a:solidFill>
-                <a:latin typeface="Cambria" panose="02040503050406030204" pitchFamily="18" charset="0"/>
-                <a:ea typeface="Cambria" panose="02040503050406030204" pitchFamily="18" charset="0"/>
-                <a:cs typeface="Verdana"/>
-                <a:sym typeface="Verdana"/>
-              </a:rPr>
-              <a:t>Name of the </a:t>
-            </a:r>
-            <a:r>
-              <a:rPr lang="en-US" sz="2000" b="1" dirty="0" smtClean="0">
-                <a:solidFill>
-                  <a:schemeClr val="accent1"/>
-                </a:solidFill>
-                <a:latin typeface="Cambria" panose="02040503050406030204" pitchFamily="18" charset="0"/>
-                <a:ea typeface="Cambria" panose="02040503050406030204" pitchFamily="18" charset="0"/>
-                <a:cs typeface="Verdana"/>
-                <a:sym typeface="Verdana"/>
-              </a:rPr>
-              <a:t>School Internship Coordinator: </a:t>
-            </a:r>
-            <a:r>
-              <a:rPr lang="en-US" sz="2000" b="1" dirty="0">
-                <a:latin typeface="Cambria" panose="02040503050406030204" pitchFamily="18" charset="0"/>
-                <a:ea typeface="Cambria" panose="02040503050406030204" pitchFamily="18" charset="0"/>
-                <a:cs typeface="Verdana"/>
-                <a:sym typeface="Verdana"/>
-              </a:rPr>
-              <a:t>D</a:t>
-            </a:r>
-            <a:r>
-              <a:rPr lang="en-US" sz="2000" b="1" dirty="0" smtClean="0">
-                <a:latin typeface="Cambria" panose="02040503050406030204" pitchFamily="18" charset="0"/>
-                <a:ea typeface="Cambria" panose="02040503050406030204" pitchFamily="18" charset="0"/>
-                <a:cs typeface="Verdana"/>
-                <a:sym typeface="Verdana"/>
-              </a:rPr>
-              <a:t>r</a:t>
-            </a:r>
-            <a:r>
-              <a:rPr lang="en-US" sz="2000" b="1" dirty="0">
-                <a:latin typeface="Cambria" panose="02040503050406030204" pitchFamily="18" charset="0"/>
-                <a:ea typeface="Cambria" panose="02040503050406030204" pitchFamily="18" charset="0"/>
-                <a:cs typeface="Verdana"/>
-                <a:sym typeface="Verdana"/>
-              </a:rPr>
-              <a:t>. Md Ziaur </a:t>
-            </a:r>
-            <a:r>
-              <a:rPr lang="en-US" sz="2000" b="1" dirty="0" smtClean="0">
-                <a:latin typeface="Cambria" panose="02040503050406030204" pitchFamily="18" charset="0"/>
-                <a:ea typeface="Cambria" panose="02040503050406030204" pitchFamily="18" charset="0"/>
-                <a:cs typeface="Verdana"/>
-                <a:sym typeface="Verdana"/>
-              </a:rPr>
-              <a:t>Rahman</a:t>
-            </a:r>
-          </a:p>
-          <a:p>
-            <a:pPr lvl="0">
-              <a:buClr>
-                <a:srgbClr val="17365D"/>
-              </a:buClr>
-              <a:buSzPct val="100000"/>
-            </a:pPr>
-            <a:r>
-              <a:rPr lang="en-US" sz="2000" b="1" dirty="0">
-                <a:latin typeface="Cambria" panose="02040503050406030204" pitchFamily="18" charset="0"/>
-                <a:ea typeface="Cambria" panose="02040503050406030204" pitchFamily="18" charset="0"/>
-                <a:cs typeface="Verdana"/>
-                <a:sym typeface="Verdana"/>
-              </a:rPr>
-              <a:t> </a:t>
-            </a:r>
-            <a:r>
-              <a:rPr lang="en-US" sz="2000" b="1" dirty="0" smtClean="0">
-                <a:latin typeface="Cambria" panose="02040503050406030204" pitchFamily="18" charset="0"/>
-                <a:ea typeface="Cambria" panose="02040503050406030204" pitchFamily="18" charset="0"/>
-                <a:cs typeface="Verdana"/>
-                <a:sym typeface="Verdana"/>
-              </a:rPr>
-              <a:t>													</a:t>
-            </a:r>
-            <a:endParaRPr sz="2000" b="1" i="0" u="none" strike="noStrike" cap="none" dirty="0">
-              <a:solidFill>
-                <a:schemeClr val="tx1"/>
               </a:solidFill>
               <a:latin typeface="Cambria" panose="02040503050406030204" pitchFamily="18" charset="0"/>
               <a:ea typeface="Cambria" panose="02040503050406030204" pitchFamily="18" charset="0"/>
@@ -9389,40 +9137,7 @@
                 <a:ea typeface="Tahoma" pitchFamily="34" charset="0"/>
                 <a:cs typeface="Times New Roman" panose="02020603050405020304" pitchFamily="18" charset="0"/>
               </a:rPr>
-              <a:t> Audit &amp; Assurance -</a:t>
-            </a:r>
-            <a:r>
-              <a:rPr lang="en-US" sz="2400" dirty="0" smtClean="0">
-                <a:solidFill>
-                  <a:srgbClr val="0070C0"/>
-                </a:solidFill>
-                <a:latin typeface="Times New Roman" panose="02020603050405020304" pitchFamily="18" charset="0"/>
-                <a:ea typeface="Tahoma" pitchFamily="34" charset="0"/>
-                <a:cs typeface="Times New Roman" panose="02020603050405020304" pitchFamily="18" charset="0"/>
-              </a:rPr>
-              <a:t> </a:t>
-            </a:r>
-            <a:r>
-              <a:rPr lang="en-US" sz="2400" dirty="0" smtClean="0">
-                <a:solidFill>
-                  <a:srgbClr val="0070C0"/>
-                </a:solidFill>
-                <a:latin typeface="Times New Roman" panose="02020603050405020304" pitchFamily="18" charset="0"/>
-                <a:ea typeface="Tahoma" pitchFamily="34" charset="0"/>
-                <a:cs typeface="Times New Roman" panose="02020603050405020304" pitchFamily="18" charset="0"/>
-              </a:rPr>
-              <a:t>ITDA </a:t>
-            </a:r>
-            <a:r>
-              <a:rPr lang="en-US" sz="2400" dirty="0" smtClean="0">
-                <a:solidFill>
-                  <a:srgbClr val="0070C0"/>
-                </a:solidFill>
-                <a:latin typeface="Times New Roman" panose="02020603050405020304" pitchFamily="18" charset="0"/>
-                <a:ea typeface="Tahoma" pitchFamily="34" charset="0"/>
-                <a:cs typeface="Times New Roman" panose="02020603050405020304" pitchFamily="18" charset="0"/>
-              </a:rPr>
-              <a:t/>
+              <a:t>ITDA Audit</a:t>
             </a:r>
             <a:br>
               <a:rPr lang="en-US" sz="2400" dirty="0" smtClean="0">
@@ -9557,7 +9272,7 @@
                           <a:ea typeface="Cambria" panose="02040503050406030204" pitchFamily="18" charset="0"/>
                           <a:cs typeface="Times New Roman" panose="02020603050405020304" pitchFamily="18" charset="0"/>
                         </a:rPr>
-                        <a:t>Tanushree R</a:t>
+                        <a:t>TANUSHREE</a:t>
                       </a:r>
                       <a:endParaRPr lang="en-US" dirty="0">
                         <a:latin typeface="Cambria" panose="02040503050406030204" pitchFamily="18" charset="0"/>
@@ -9684,6 +9399,237 @@
           </a:graphicData>
         </a:graphic>
       </p:graphicFrame>
+      <p:sp>
+        <p:nvSpPr>
+          <p:cNvPr id="7" name="Google Shape;91;p13"/>
+          <p:cNvSpPr txBox="1"/>
+          <p:nvPr/>
+        </p:nvSpPr>
+        <p:spPr>
+          <a:xfrm>
+            <a:off x="156411" y="4130278"/>
+            <a:ext cx="12249915" cy="1562100"/>
+          </a:xfrm>
+          <a:prstGeom prst="rect">
+            <a:avLst/>
+          </a:prstGeom>
+          <a:noFill/>
+          <a:ln>
+            <a:noFill/>
+          </a:ln>
+        </p:spPr>
+        <p:txBody>
+          <a:bodyPr spcFirstLastPara="1" wrap="square" lIns="91425" tIns="45700" rIns="91425" bIns="45700" anchor="t" anchorCtr="0">
+            <a:noAutofit/>
+          </a:bodyPr>
+          <a:lstStyle/>
+          <a:p>
+            <a:pPr marL="0" marR="0" lvl="0" indent="0" rtl="0">
+              <a:spcBef>
+                <a:spcPts val="0"/>
+              </a:spcBef>
+              <a:spcAft>
+                <a:spcPts val="0"/>
+              </a:spcAft>
+              <a:buClr>
+                <a:srgbClr val="17365D"/>
+              </a:buClr>
+              <a:buSzPct val="100000"/>
+              <a:buFont typeface="Arial"/>
+              <a:buNone/>
+            </a:pPr>
+            <a:r>
+              <a:rPr lang="en-US" sz="2000" b="1" i="0" u="none" strike="noStrike" cap="none" dirty="0" smtClean="0">
+                <a:solidFill>
+                  <a:schemeClr val="accent1"/>
+                </a:solidFill>
+                <a:latin typeface="Cambria" panose="02040503050406030204" pitchFamily="18" charset="0"/>
+                <a:ea typeface="Cambria" panose="02040503050406030204" pitchFamily="18" charset="0"/>
+                <a:cs typeface="Verdana"/>
+                <a:sym typeface="Verdana"/>
+              </a:rPr>
+              <a:t>Name of the Program: </a:t>
+            </a:r>
+            <a:r>
+              <a:rPr lang="en-US" sz="2000" b="1" i="0" u="none" strike="noStrike" cap="none" dirty="0" smtClean="0">
+                <a:latin typeface="Cambria" panose="02040503050406030204" pitchFamily="18" charset="0"/>
+                <a:ea typeface="Cambria" panose="02040503050406030204" pitchFamily="18" charset="0"/>
+                <a:cs typeface="Verdana"/>
+                <a:sym typeface="Verdana"/>
+              </a:rPr>
+              <a:t>B.Tech</a:t>
+            </a:r>
+            <a:endParaRPr lang="en-US" sz="2000" b="1" i="0" u="none" strike="noStrike" cap="none" dirty="0" smtClean="0">
+              <a:latin typeface="Cambria" panose="02040503050406030204" pitchFamily="18" charset="0"/>
+              <a:ea typeface="Cambria" panose="02040503050406030204" pitchFamily="18" charset="0"/>
+              <a:cs typeface="Verdana"/>
+              <a:sym typeface="Verdana"/>
+            </a:endParaRPr>
+          </a:p>
+          <a:p>
+            <a:pPr lvl="0">
+              <a:buClr>
+                <a:srgbClr val="17365D"/>
+              </a:buClr>
+              <a:buSzPct val="100000"/>
+            </a:pPr>
+            <a:r>
+              <a:rPr lang="en-US" sz="2000" b="1" dirty="0" smtClean="0">
+                <a:solidFill>
+                  <a:schemeClr val="accent1"/>
+                </a:solidFill>
+                <a:latin typeface="Cambria" panose="02040503050406030204" pitchFamily="18" charset="0"/>
+                <a:ea typeface="Cambria" panose="02040503050406030204" pitchFamily="18" charset="0"/>
+                <a:cs typeface="Verdana"/>
+                <a:sym typeface="Verdana"/>
+              </a:rPr>
+              <a:t>Name of the HoD: </a:t>
+            </a:r>
+            <a:r>
+              <a:rPr lang="en-US" sz="2000" b="1" dirty="0" smtClean="0">
+                <a:latin typeface="Cambria" pitchFamily="18" charset="0"/>
+                <a:ea typeface="Cambria" pitchFamily="18" charset="0"/>
+                <a:cs typeface="Times New Roman" pitchFamily="18" charset="0"/>
+              </a:rPr>
+              <a:t>Dr. S. </a:t>
+            </a:r>
+            <a:r>
+              <a:rPr lang="en-US" sz="2000" b="1" dirty="0" smtClean="0">
+                <a:latin typeface="Cambria" pitchFamily="18" charset="0"/>
+                <a:ea typeface="Cambria" pitchFamily="18" charset="0"/>
+                <a:cs typeface="Times New Roman" pitchFamily="18" charset="0"/>
+              </a:rPr>
+              <a:t>Pravinthraja</a:t>
+            </a:r>
+            <a:endParaRPr lang="en-US" sz="2000" b="1" dirty="0" smtClean="0">
+              <a:solidFill>
+                <a:schemeClr val="accent1"/>
+              </a:solidFill>
+              <a:latin typeface="Cambria" pitchFamily="18" charset="0"/>
+              <a:ea typeface="Cambria" pitchFamily="18" charset="0"/>
+              <a:cs typeface="Times New Roman" pitchFamily="18" charset="0"/>
+              <a:sym typeface="Verdana"/>
+            </a:endParaRPr>
+          </a:p>
+          <a:p>
+            <a:pPr lvl="0">
+              <a:buClr>
+                <a:srgbClr val="17365D"/>
+              </a:buClr>
+              <a:buSzPct val="100000"/>
+            </a:pPr>
+            <a:r>
+              <a:rPr lang="en-US" sz="2000" b="1" i="0" u="none" strike="noStrike" cap="none" dirty="0" smtClean="0">
+                <a:solidFill>
+                  <a:schemeClr val="accent1"/>
+                </a:solidFill>
+                <a:latin typeface="Cambria" panose="02040503050406030204" pitchFamily="18" charset="0"/>
+                <a:ea typeface="Cambria" panose="02040503050406030204" pitchFamily="18" charset="0"/>
+                <a:cs typeface="Verdana"/>
+                <a:sym typeface="Verdana"/>
+              </a:rPr>
+              <a:t>Name of the Program Internship Coordinator: </a:t>
+            </a:r>
+            <a:r>
+              <a:rPr lang="en-US" sz="2000" b="1" dirty="0" smtClean="0">
+                <a:latin typeface="Cambria" pitchFamily="18" charset="0"/>
+                <a:ea typeface="Cambria" pitchFamily="18" charset="0"/>
+                <a:cs typeface="Times New Roman" pitchFamily="18" charset="0"/>
+              </a:rPr>
+              <a:t>Mrs. Nisha Robin Rohit </a:t>
+            </a:r>
+            <a:endParaRPr lang="en-US" sz="2000" b="1" i="0" u="none" strike="noStrike" cap="none" dirty="0" smtClean="0">
+              <a:solidFill>
+                <a:schemeClr val="accent1"/>
+              </a:solidFill>
+              <a:latin typeface="Cambria" pitchFamily="18" charset="0"/>
+              <a:ea typeface="Cambria" pitchFamily="18" charset="0"/>
+              <a:cs typeface="Times New Roman" pitchFamily="18" charset="0"/>
+              <a:sym typeface="Verdana"/>
+            </a:endParaRPr>
+          </a:p>
+          <a:p>
+            <a:pPr lvl="0">
+              <a:buClr>
+                <a:srgbClr val="17365D"/>
+              </a:buClr>
+              <a:buSzPct val="100000"/>
+            </a:pPr>
+            <a:r>
+              <a:rPr lang="en-US" sz="2000" b="1" dirty="0">
+                <a:solidFill>
+                  <a:schemeClr val="accent1"/>
+                </a:solidFill>
+                <a:latin typeface="Cambria" panose="02040503050406030204" pitchFamily="18" charset="0"/>
+                <a:ea typeface="Cambria" panose="02040503050406030204" pitchFamily="18" charset="0"/>
+                <a:cs typeface="Verdana"/>
+                <a:sym typeface="Verdana"/>
+              </a:rPr>
+              <a:t>Name of the </a:t>
+            </a:r>
+            <a:r>
+              <a:rPr lang="en-US" sz="2000" b="1" dirty="0" smtClean="0">
+                <a:solidFill>
+                  <a:schemeClr val="accent1"/>
+                </a:solidFill>
+                <a:latin typeface="Cambria" panose="02040503050406030204" pitchFamily="18" charset="0"/>
+                <a:ea typeface="Cambria" panose="02040503050406030204" pitchFamily="18" charset="0"/>
+                <a:cs typeface="Verdana"/>
+                <a:sym typeface="Verdana"/>
+              </a:rPr>
+              <a:t>School Internship Coordinator: </a:t>
+            </a:r>
+            <a:r>
+              <a:rPr lang="en-US" sz="2000" b="1" dirty="0" smtClean="0">
+                <a:latin typeface="Cambria" pitchFamily="18" charset="0"/>
+                <a:ea typeface="Cambria" pitchFamily="18" charset="0"/>
+              </a:rPr>
+              <a:t>Dr. Geetha A </a:t>
+            </a:r>
+            <a:endParaRPr lang="en-US" sz="2000" b="1" dirty="0" smtClean="0">
+              <a:latin typeface="Cambria" pitchFamily="18" charset="0"/>
+              <a:ea typeface="Cambria" pitchFamily="18" charset="0"/>
+              <a:cs typeface="Verdana"/>
+              <a:sym typeface="Verdana"/>
+            </a:endParaRPr>
+          </a:p>
+          <a:p>
+            <a:pPr lvl="0">
+              <a:buClr>
+                <a:srgbClr val="17365D"/>
+              </a:buClr>
+              <a:buSzPct val="100000"/>
+            </a:pPr>
+            <a:r>
+              <a:rPr lang="en-US" sz="2000" b="1" dirty="0">
+                <a:latin typeface="Cambria" panose="02040503050406030204" pitchFamily="18" charset="0"/>
+                <a:ea typeface="Cambria" panose="02040503050406030204" pitchFamily="18" charset="0"/>
+                <a:cs typeface="Verdana"/>
+                <a:sym typeface="Verdana"/>
+              </a:rPr>
+              <a:t> </a:t>
+            </a:r>
+            <a:r>
+              <a:rPr lang="en-US" sz="2000" b="1" dirty="0" smtClean="0">
+                <a:latin typeface="Cambria" panose="02040503050406030204" pitchFamily="18" charset="0"/>
+                <a:ea typeface="Cambria" panose="02040503050406030204" pitchFamily="18" charset="0"/>
+                <a:cs typeface="Verdana"/>
+                <a:sym typeface="Verdana"/>
+              </a:rPr>
+              <a:t>													</a:t>
+            </a:r>
+            <a:endParaRPr sz="2000" b="1" i="0" u="none" strike="noStrike" cap="none" dirty="0">
+              <a:solidFill>
+                <a:schemeClr val="tx1"/>
+              </a:solidFill>
+              <a:latin typeface="Cambria" panose="02040503050406030204" pitchFamily="18" charset="0"/>
+              <a:ea typeface="Cambria" panose="02040503050406030204" pitchFamily="18" charset="0"/>
+              <a:cs typeface="Verdana"/>
+              <a:sym typeface="Verdana"/>
+            </a:endParaRPr>
+          </a:p>
+        </p:txBody>
+      </p:sp>
     </p:spTree>
     <p:extLst>
       <p:ext uri="{BB962C8B-B14F-4D97-AF65-F5344CB8AC3E}">
@@ -11808,10 +11754,6 @@
               </a:rPr>
               <a:t>Soundaryasri K S </a:t>
             </a:r>
-            <a:endParaRPr lang="en-IN" dirty="0" smtClean="0">
-              <a:latin typeface="Times New Roman" panose="02020603050405020304" pitchFamily="18" charset="0"/>
-              <a:cs typeface="Times New Roman" panose="02020603050405020304" pitchFamily="18" charset="0"/>
-            </a:endParaRPr>
           </a:p>
           <a:p>
             <a:pPr>
@@ -12007,10 +11949,6 @@
               </a:rPr>
               <a:t>Meeting Deadlines</a:t>
             </a:r>
-            <a:endParaRPr lang="en-IN" dirty="0" smtClean="0">
-              <a:latin typeface="Times New Roman" panose="02020603050405020304" pitchFamily="18" charset="0"/>
-              <a:cs typeface="Times New Roman" panose="02020603050405020304" pitchFamily="18" charset="0"/>
-            </a:endParaRPr>
           </a:p>
           <a:p>
             <a:r>
@@ -12188,10 +12126,6 @@
               </a:rPr>
               <a:t>Accurate</a:t>
             </a:r>
-            <a:endParaRPr lang="en-IN" dirty="0" smtClean="0">
-              <a:latin typeface="Times New Roman" panose="02020603050405020304" pitchFamily="18" charset="0"/>
-              <a:cs typeface="Times New Roman" panose="02020603050405020304" pitchFamily="18" charset="0"/>
-            </a:endParaRPr>
           </a:p>
           <a:p>
             <a:r>
@@ -12217,30 +12151,16 @@
                 <a:latin typeface="Times New Roman" panose="02020603050405020304" pitchFamily="18" charset="0"/>
                 <a:cs typeface="Times New Roman" panose="02020603050405020304" pitchFamily="18" charset="0"/>
               </a:rPr>
-              <a:t>C</a:t>
-            </a:r>
+              <a:t>Consistent</a:t>
+            </a:r>
+          </a:p>
+          <a:p>
             <a:r>
               <a:rPr lang="en-IN" dirty="0" smtClean="0">
                 <a:latin typeface="Times New Roman" panose="02020603050405020304" pitchFamily="18" charset="0"/>
                 <a:cs typeface="Times New Roman" panose="02020603050405020304" pitchFamily="18" charset="0"/>
               </a:rPr>
-              <a:t>onsistent</a:t>
-            </a:r>
-          </a:p>
-          <a:p>
-            <a:r>
-              <a:rPr lang="en-IN" dirty="0" smtClean="0">
-                <a:latin typeface="Times New Roman" panose="02020603050405020304" pitchFamily="18" charset="0"/>
-                <a:cs typeface="Times New Roman" panose="02020603050405020304" pitchFamily="18" charset="0"/>
-              </a:rPr>
-              <a:t>V</a:t>
-            </a:r>
-            <a:r>
-              <a:rPr lang="en-IN" dirty="0" smtClean="0">
-                <a:latin typeface="Times New Roman" panose="02020603050405020304" pitchFamily="18" charset="0"/>
-                <a:cs typeface="Times New Roman" panose="02020603050405020304" pitchFamily="18" charset="0"/>
-              </a:rPr>
-              <a:t>alid</a:t>
+              <a:t>Valid</a:t>
             </a:r>
           </a:p>
           <a:p>
@@ -12430,28 +12350,7 @@
                 <a:latin typeface="Times New Roman" panose="02020603050405020304" pitchFamily="18" charset="0"/>
                 <a:cs typeface="Times New Roman" panose="02020603050405020304" pitchFamily="18" charset="0"/>
               </a:rPr>
-              <a:t> </a:t>
-            </a:r>
-            <a:r>
-              <a:rPr lang="en-IN" dirty="0" smtClean="0">
-                <a:latin typeface="Times New Roman" panose="02020603050405020304" pitchFamily="18" charset="0"/>
-                <a:cs typeface="Times New Roman" panose="02020603050405020304" pitchFamily="18" charset="0"/>
-              </a:rPr>
-              <a:t>related to </a:t>
-            </a:r>
-            <a:r>
-              <a:rPr lang="en-IN" dirty="0" smtClean="0">
-                <a:latin typeface="Times New Roman" panose="02020603050405020304" pitchFamily="18" charset="0"/>
-                <a:cs typeface="Times New Roman" panose="02020603050405020304" pitchFamily="18" charset="0"/>
-              </a:rPr>
-              <a:t>D</a:t>
-            </a:r>
-            <a:r>
-              <a:rPr lang="en-IN" dirty="0" smtClean="0">
-                <a:latin typeface="Times New Roman" panose="02020603050405020304" pitchFamily="18" charset="0"/>
-                <a:cs typeface="Times New Roman" panose="02020603050405020304" pitchFamily="18" charset="0"/>
-              </a:rPr>
-              <a:t>eloitte and the job role.)</a:t>
+              <a:t> related to Deloitte and the job role.)</a:t>
             </a:r>
           </a:p>
           <a:p>
